--- a/week2_molecular_representation/slides.pptx
+++ b/week2_molecular_representation/slides.pptx
@@ -729,7 +729,71 @@
           <a:lstStyle/>
           <a:p>
             <a:r>
-              <a:t>Spend 3 minutes on descriptors. LogP is particularly important: drugs need to cross cell membranes. Too hydrophilic = cannot cross, too lipophilic = gets stuck in fat tissue. The sweet spot is LogP 1-3. TPSA correlates with oral bioavailability: TPSA &lt; 140 A squared is generally needed for oral drugs.</a:t>
+              <a:t>Spend 3-4 minutes on descriptors.</a:t>
+            </a:r>
+          </a:p>
+          <a:p/>
+          <a:p>
+            <a:r>
+              <a:t>=== CNS DRUG PROPERTIES ===</a:t>
+            </a:r>
+          </a:p>
+          <a:p>
+            <a:r>
+              <a:t>For CNS drugs, the blood-brain barrier (BBB) adds extra property constraints beyond Lipinski's Ro5:</a:t>
+            </a:r>
+          </a:p>
+          <a:p>
+            <a:r>
+              <a:t>- MW &lt; 450 Da (smaller molecules cross BBB better)</a:t>
+            </a:r>
+          </a:p>
+          <a:p>
+            <a:r>
+              <a:t>- LogP between 1 and 3 (need to be lipophilic enough to cross lipid membranes, but not too lipophilic)</a:t>
+            </a:r>
+          </a:p>
+          <a:p>
+            <a:r>
+              <a:t>- HBD &lt; 3 (fewer hydrogen bonds = easier membrane crossing)</a:t>
+            </a:r>
+          </a:p>
+          <a:p>
+            <a:r>
+              <a:t>- TPSA &lt; 90 Å² (lower polar surface area = better BBB penetration)</a:t>
+            </a:r>
+          </a:p>
+          <a:p>
+            <a:r>
+              <a:t>- Few rotatable bonds (rigid molecules cross better)</a:t>
+            </a:r>
+          </a:p>
+          <a:p/>
+          <a:p>
+            <a:r>
+              <a:t>Reference: Pardridge, W.M. (2005). The blood-brain barrier: bottleneck in brain drug development. NeuroRx 2:3-14.</a:t>
+            </a:r>
+          </a:p>
+          <a:p/>
+          <a:p>
+            <a:r>
+              <a:t>Interesting comparison:</a:t>
+            </a:r>
+          </a:p>
+          <a:p>
+            <a:r>
+              <a:t>- Serotonin itself has MW=176.2, LogP=0.2, TPSA=66.5 -&gt; it does NOT cross the BBB well from outside. That's why we give L-tryptophan (precursor) or SSRIs (which cross BBB) rather than serotonin itself.</a:t>
+            </a:r>
+          </a:p>
+          <a:p>
+            <a:r>
+              <a:t>- Dopamine (MW=153.2, LogP=-1.0) also cannot cross the BBB. That's why Parkinson's patients take L-DOPA (MW=197, LogP=-2.7), which DOES cross the BBB and is converted to dopamine inside the brain by DOPA decarboxylase.</a:t>
+            </a:r>
+          </a:p>
+          <a:p/>
+          <a:p>
+            <a:r>
+              <a:t>This is a perfect ML task: predict BBB permeability from molecular descriptors! Models for BBB penetration are widely used in CNS drug discovery.</a:t>
             </a:r>
           </a:p>
         </p:txBody>
@@ -1429,7 +1493,109 @@
           <a:lstStyle/>
           <a:p>
             <a:r>
-              <a:t>Interactive slide, 3-4 minutes. Reveal answers one by one. For caffeine, walk through the SMILES. Testosterone is a good example of a complex multi-ring system. The point is to show that SMILES can represent complex molecules compactly. In practice, nobody writes SMILES by hand for complex molecules. We use drawing tools that convert drawings to SMILES.</a:t>
+              <a:t>Interactive slide, 3-4 minutes. Reveal answers one by one.</a:t>
+            </a:r>
+          </a:p>
+          <a:p/>
+          <a:p>
+            <a:r>
+              <a:t>=== NEUROSCIENCE DRUG SMILES WALKTHROUGH ===</a:t>
+            </a:r>
+          </a:p>
+          <a:p/>
+          <a:p>
+            <a:r>
+              <a:t>1. SEROTONIN: NCCc1c[nH]c2ccc(O)cc12</a:t>
+            </a:r>
+          </a:p>
+          <a:p>
+            <a:r>
+              <a:t>   - N = amine group, CC = ethyl chain, then an indole ring ([nH] = NH in ring) with a hydroxyl (O) at position 5.</a:t>
+            </a:r>
+          </a:p>
+          <a:p>
+            <a:r>
+              <a:t>   - This is 5-hydroxytryptamine (5-HT), the neurotransmitter involved in mood, sleep, appetite.</a:t>
+            </a:r>
+          </a:p>
+          <a:p>
+            <a:r>
+              <a:t>   - Drug connection: SSRIs (Prozac, Zoloft) block serotonin reuptake. Triptans (sumatriptan) activate 5-HT1B/1D receptors for migraine.</a:t>
+            </a:r>
+          </a:p>
+          <a:p/>
+          <a:p>
+            <a:r>
+              <a:t>2. DOPAMINE: NCCc1ccc(O)c(O)c1</a:t>
+            </a:r>
+          </a:p>
+          <a:p>
+            <a:r>
+              <a:t>   - N = amine, CC = ethyl chain, then a catechol ring (benzene with two adjacent OH groups).</a:t>
+            </a:r>
+          </a:p>
+          <a:p>
+            <a:r>
+              <a:t>   - Key neurotransmitter for reward, movement, motivation.</a:t>
+            </a:r>
+          </a:p>
+          <a:p>
+            <a:r>
+              <a:t>   - Drug connection: L-DOPA for Parkinson's, antipsychotics (block D2 receptors), methylphenidate/Ritalin (blocks DAT).</a:t>
+            </a:r>
+          </a:p>
+          <a:p/>
+          <a:p>
+            <a:r>
+              <a:t>3. GABA: NCCCC(=O)O</a:t>
+            </a:r>
+          </a:p>
+          <a:p>
+            <a:r>
+              <a:t>   - Very simple: amine-4 carbons-carboxyl group. Gamma-aminobutyric acid.</a:t>
+            </a:r>
+          </a:p>
+          <a:p>
+            <a:r>
+              <a:t>   - The main inhibitory neurotransmitter. GABA-A receptor is in the same superfamily as GluCl (Dr. Serbe-Kamp's research!).</a:t>
+            </a:r>
+          </a:p>
+          <a:p>
+            <a:r>
+              <a:t>   - Drug connection: benzodiazepines, barbiturates, general anesthetics all modulate GABA-A.</a:t>
+            </a:r>
+          </a:p>
+          <a:p/>
+          <a:p>
+            <a:r>
+              <a:t>4. ASPIRIN: CC(=O)Oc1ccccc1C(=O)O</a:t>
+            </a:r>
+          </a:p>
+          <a:p>
+            <a:r>
+              <a:t>   - Acetyl group + salicylic acid. COX-1/COX-2 inhibitor.</a:t>
+            </a:r>
+          </a:p>
+          <a:p/>
+          <a:p>
+            <a:r>
+              <a:t>5. CAFFEINE: Cn1c(=O)c2c(ncn2C)n(C)c1=O</a:t>
+            </a:r>
+          </a:p>
+          <a:p>
+            <a:r>
+              <a:t>   - Xanthine derivative. Three N-methyl groups on a purine ring.</a:t>
+            </a:r>
+          </a:p>
+          <a:p>
+            <a:r>
+              <a:t>   - Adenosine A1/A2A receptor antagonist. Students can test caffeine effects with the SpikerBot!</a:t>
+            </a:r>
+          </a:p>
+          <a:p/>
+          <a:p>
+            <a:r>
+              <a:t>Ask students: notice how simple GABA is compared to serotonin? Yet both are critical neurotransmitters. The complexity of a molecule does not predict its biological importance.</a:t>
             </a:r>
           </a:p>
         </p:txBody>
@@ -5516,132 +5682,145 @@
               </a:defRPr>
             </a:pPr>
             <a:r>
-              <a:t>  Molecular Weight (MW) - size of the molecule</a:t>
-            </a:r>
-          </a:p>
-          <a:p>
-            <a:pPr>
-              <a:spcAft>
-                <a:spcPts val="800"/>
-              </a:spcAft>
-              <a:defRPr sz="2000">
-                <a:solidFill>
-                  <a:srgbClr val="323232"/>
-                </a:solidFill>
-                <a:latin typeface="Calibri"/>
-              </a:defRPr>
-            </a:pPr>
-            <a:r>
-              <a:t>  LogP - lipophilicity (oil vs. water preference)</a:t>
-            </a:r>
-          </a:p>
-          <a:p>
-            <a:pPr>
-              <a:spcAft>
-                <a:spcPts val="800"/>
-              </a:spcAft>
-              <a:defRPr sz="2000">
-                <a:solidFill>
-                  <a:srgbClr val="323232"/>
-                </a:solidFill>
-                <a:latin typeface="Calibri"/>
-              </a:defRPr>
-            </a:pPr>
-            <a:r>
-              <a:t>  Number of H-bond donors (HBD) &amp; acceptors (HBA)</a:t>
-            </a:r>
-          </a:p>
-          <a:p>
-            <a:pPr>
-              <a:spcAft>
-                <a:spcPts val="800"/>
-              </a:spcAft>
-              <a:defRPr sz="2000">
-                <a:solidFill>
-                  <a:srgbClr val="323232"/>
-                </a:solidFill>
-                <a:latin typeface="Calibri"/>
-              </a:defRPr>
-            </a:pPr>
-            <a:r>
-              <a:t>  Topological Polar Surface Area (TPSA)</a:t>
-            </a:r>
-          </a:p>
-          <a:p>
-            <a:pPr>
-              <a:spcAft>
-                <a:spcPts val="800"/>
-              </a:spcAft>
-              <a:defRPr sz="2000">
-                <a:solidFill>
-                  <a:srgbClr val="323232"/>
-                </a:solidFill>
-                <a:latin typeface="Calibri"/>
-              </a:defRPr>
-            </a:pPr>
-            <a:r>
-              <a:t>  Number of rotatable bonds - molecular flexibility</a:t>
-            </a:r>
-          </a:p>
-          <a:p>
-            <a:pPr>
-              <a:spcAft>
-                <a:spcPts val="800"/>
-              </a:spcAft>
-              <a:defRPr sz="2000">
-                <a:solidFill>
-                  <a:srgbClr val="323232"/>
-                </a:solidFill>
-                <a:latin typeface="Calibri"/>
-              </a:defRPr>
-            </a:pPr>
-            <a:r>
-              <a:t>  Number of aromatic rings</a:t>
-            </a:r>
-          </a:p>
-          <a:p>
-            <a:pPr>
-              <a:spcAft>
-                <a:spcPts val="800"/>
-              </a:spcAft>
-              <a:defRPr sz="2000">
-                <a:solidFill>
-                  <a:srgbClr val="323232"/>
-                </a:solidFill>
-                <a:latin typeface="Calibri"/>
-              </a:defRPr>
-            </a:pPr>
-          </a:p>
-          <a:p>
-            <a:pPr>
-              <a:spcAft>
-                <a:spcPts val="800"/>
-              </a:spcAft>
-              <a:defRPr sz="2000">
-                <a:solidFill>
-                  <a:srgbClr val="323232"/>
-                </a:solidFill>
-                <a:latin typeface="Calibri"/>
-              </a:defRPr>
-            </a:pPr>
-            <a:r>
-              <a:t>RDKit can calculate 200+ descriptors: Descriptors.descList</a:t>
-            </a:r>
-          </a:p>
-          <a:p>
-            <a:pPr>
-              <a:spcAft>
-                <a:spcPts val="800"/>
-              </a:spcAft>
-              <a:defRPr sz="2000">
-                <a:solidFill>
-                  <a:srgbClr val="323232"/>
-                </a:solidFill>
-                <a:latin typeface="Calibri"/>
-              </a:defRPr>
-            </a:pPr>
-            <a:r>
-              <a:t>Mordred library: &gt;1800 descriptors (Moriwaki et al. 2018)</a:t>
+              <a:t>  Molecular Weight (MW)  |  LogP - lipophilicity (BBB penetration!)</a:t>
+            </a:r>
+          </a:p>
+          <a:p>
+            <a:pPr>
+              <a:spcAft>
+                <a:spcPts val="800"/>
+              </a:spcAft>
+              <a:defRPr sz="2000">
+                <a:solidFill>
+                  <a:srgbClr val="323232"/>
+                </a:solidFill>
+                <a:latin typeface="Calibri"/>
+              </a:defRPr>
+            </a:pPr>
+            <a:r>
+              <a:t>  H-bond donors (HBD) &amp; acceptors (HBA)  |  TPSA (polar surface area)</a:t>
+            </a:r>
+          </a:p>
+          <a:p>
+            <a:pPr>
+              <a:spcAft>
+                <a:spcPts val="800"/>
+              </a:spcAft>
+              <a:defRPr sz="2000">
+                <a:solidFill>
+                  <a:srgbClr val="323232"/>
+                </a:solidFill>
+                <a:latin typeface="Calibri"/>
+              </a:defRPr>
+            </a:pPr>
+            <a:r>
+              <a:t>  Rotatable bonds (flexibility)  |  Aromatic rings</a:t>
+            </a:r>
+          </a:p>
+          <a:p>
+            <a:pPr>
+              <a:spcAft>
+                <a:spcPts val="800"/>
+              </a:spcAft>
+              <a:defRPr sz="2000">
+                <a:solidFill>
+                  <a:srgbClr val="323232"/>
+                </a:solidFill>
+                <a:latin typeface="Calibri"/>
+              </a:defRPr>
+            </a:pPr>
+          </a:p>
+          <a:p>
+            <a:pPr>
+              <a:spcAft>
+                <a:spcPts val="800"/>
+              </a:spcAft>
+              <a:defRPr sz="2000">
+                <a:solidFill>
+                  <a:srgbClr val="323232"/>
+                </a:solidFill>
+                <a:latin typeface="Calibri"/>
+              </a:defRPr>
+            </a:pPr>
+            <a:r>
+              <a:t>For CNS drugs: crossing the blood-brain barrier is critical!</a:t>
+            </a:r>
+          </a:p>
+          <a:p>
+            <a:pPr>
+              <a:spcAft>
+                <a:spcPts val="800"/>
+              </a:spcAft>
+              <a:defRPr sz="2000">
+                <a:solidFill>
+                  <a:srgbClr val="323232"/>
+                </a:solidFill>
+                <a:latin typeface="Calibri"/>
+              </a:defRPr>
+            </a:pPr>
+            <a:r>
+              <a:t>  Lipinski + BBB rules: MW &lt; 450, LogP 1-3, HBD &lt; 3, TPSA &lt; 90</a:t>
+            </a:r>
+          </a:p>
+          <a:p>
+            <a:pPr>
+              <a:spcAft>
+                <a:spcPts val="800"/>
+              </a:spcAft>
+              <a:defRPr sz="2000">
+                <a:solidFill>
+                  <a:srgbClr val="323232"/>
+                </a:solidFill>
+                <a:latin typeface="Calibri"/>
+              </a:defRPr>
+            </a:pPr>
+            <a:r>
+              <a:t>  Pardridge (2005), NeuroRx 2:3-14</a:t>
+            </a:r>
+          </a:p>
+          <a:p>
+            <a:pPr>
+              <a:spcAft>
+                <a:spcPts val="800"/>
+              </a:spcAft>
+              <a:defRPr sz="2000">
+                <a:solidFill>
+                  <a:srgbClr val="323232"/>
+                </a:solidFill>
+                <a:latin typeface="Calibri"/>
+              </a:defRPr>
+            </a:pPr>
+          </a:p>
+          <a:p>
+            <a:pPr>
+              <a:spcAft>
+                <a:spcPts val="800"/>
+              </a:spcAft>
+              <a:defRPr sz="2000">
+                <a:solidFill>
+                  <a:srgbClr val="323232"/>
+                </a:solidFill>
+                <a:latin typeface="Calibri"/>
+              </a:defRPr>
+            </a:pPr>
+            <a:r>
+              <a:t>RDKit: 200+ descriptors  |  Mordred: &gt;1800 descriptors</a:t>
+            </a:r>
+          </a:p>
+          <a:p>
+            <a:pPr>
+              <a:spcAft>
+                <a:spcPts val="800"/>
+              </a:spcAft>
+              <a:defRPr sz="2000">
+                <a:solidFill>
+                  <a:srgbClr val="323232"/>
+                </a:solidFill>
+                <a:latin typeface="Calibri"/>
+              </a:defRPr>
+            </a:pPr>
+            <a:r>
+              <a:t>Neuroscience example: serotonin (MW=176, LogP=0.2) vs. dopamine (MW=153, LogP=-1.0)</a:t>
             </a:r>
           </a:p>
         </p:txBody>
@@ -8277,116 +8456,116 @@
               </a:defRPr>
             </a:pPr>
             <a:r>
-              <a:t>1. CCO  -&gt;  ?</a:t>
-            </a:r>
-          </a:p>
-          <a:p>
-            <a:pPr>
-              <a:spcAft>
-                <a:spcPts val="800"/>
-              </a:spcAft>
-              <a:defRPr sz="2000">
-                <a:solidFill>
-                  <a:srgbClr val="323232"/>
-                </a:solidFill>
-                <a:latin typeface="Calibri"/>
-              </a:defRPr>
-            </a:pPr>
-            <a:r>
-              <a:t>2. c1ccccc1  -&gt;  ?</a:t>
-            </a:r>
-          </a:p>
-          <a:p>
-            <a:pPr>
-              <a:spcAft>
-                <a:spcPts val="800"/>
-              </a:spcAft>
-              <a:defRPr sz="2000">
-                <a:solidFill>
-                  <a:srgbClr val="323232"/>
-                </a:solidFill>
-                <a:latin typeface="Calibri"/>
-              </a:defRPr>
-            </a:pPr>
-            <a:r>
-              <a:t>3. CC(=O)Oc1ccccc1C(=O)O  -&gt;  ?</a:t>
-            </a:r>
-          </a:p>
-          <a:p>
-            <a:pPr>
-              <a:spcAft>
-                <a:spcPts val="800"/>
-              </a:spcAft>
-              <a:defRPr sz="2000">
-                <a:solidFill>
-                  <a:srgbClr val="323232"/>
-                </a:solidFill>
-                <a:latin typeface="Calibri"/>
-              </a:defRPr>
-            </a:pPr>
-            <a:r>
-              <a:t>4. CN1C=NC2=C1C(=O)N(C(=O)N2C)C  -&gt;  ?</a:t>
-            </a:r>
-          </a:p>
-          <a:p>
-            <a:pPr>
-              <a:spcAft>
-                <a:spcPts val="800"/>
-              </a:spcAft>
-              <a:defRPr sz="2000">
-                <a:solidFill>
-                  <a:srgbClr val="323232"/>
-                </a:solidFill>
-                <a:latin typeface="Calibri"/>
-              </a:defRPr>
-            </a:pPr>
-            <a:r>
-              <a:t>5. CC12CCC3C(C1CCC2O)CCC4=CC(=O)CCC34C  -&gt;  ?</a:t>
-            </a:r>
-          </a:p>
-          <a:p>
-            <a:pPr>
-              <a:spcAft>
-                <a:spcPts val="800"/>
-              </a:spcAft>
-              <a:defRPr sz="2000">
-                <a:solidFill>
-                  <a:srgbClr val="323232"/>
-                </a:solidFill>
-                <a:latin typeface="Calibri"/>
-              </a:defRPr>
-            </a:pPr>
-          </a:p>
-          <a:p>
-            <a:pPr>
-              <a:spcAft>
-                <a:spcPts val="800"/>
-              </a:spcAft>
-              <a:defRPr sz="2000">
-                <a:solidFill>
-                  <a:srgbClr val="323232"/>
-                </a:solidFill>
-                <a:latin typeface="Calibri"/>
-              </a:defRPr>
-            </a:pPr>
-            <a:r>
-              <a:t>Answers: 1) Ethanol  2) Benzene  3) Aspirin</a:t>
-            </a:r>
-          </a:p>
-          <a:p>
-            <a:pPr>
-              <a:spcAft>
-                <a:spcPts val="800"/>
-              </a:spcAft>
-              <a:defRPr sz="2000">
-                <a:solidFill>
-                  <a:srgbClr val="323232"/>
-                </a:solidFill>
-                <a:latin typeface="Calibri"/>
-              </a:defRPr>
-            </a:pPr>
-            <a:r>
-              <a:t>4) Caffeine  5) Testosterone</a:t>
+              <a:t>1. NCCc1c[nH]c2ccc(O)cc12  -&gt;  ?  (hint: neurotransmitter)</a:t>
+            </a:r>
+          </a:p>
+          <a:p>
+            <a:pPr>
+              <a:spcAft>
+                <a:spcPts val="800"/>
+              </a:spcAft>
+              <a:defRPr sz="2000">
+                <a:solidFill>
+                  <a:srgbClr val="323232"/>
+                </a:solidFill>
+                <a:latin typeface="Calibri"/>
+              </a:defRPr>
+            </a:pPr>
+            <a:r>
+              <a:t>2. NCCc1ccc(O)c(O)c1  -&gt;  ?  (hint: reward pathway)</a:t>
+            </a:r>
+          </a:p>
+          <a:p>
+            <a:pPr>
+              <a:spcAft>
+                <a:spcPts val="800"/>
+              </a:spcAft>
+              <a:defRPr sz="2000">
+                <a:solidFill>
+                  <a:srgbClr val="323232"/>
+                </a:solidFill>
+                <a:latin typeface="Calibri"/>
+              </a:defRPr>
+            </a:pPr>
+            <a:r>
+              <a:t>3. NCCCC(=O)O  -&gt;  ?  (hint: main inhibitory NT in the brain)</a:t>
+            </a:r>
+          </a:p>
+          <a:p>
+            <a:pPr>
+              <a:spcAft>
+                <a:spcPts val="800"/>
+              </a:spcAft>
+              <a:defRPr sz="2000">
+                <a:solidFill>
+                  <a:srgbClr val="323232"/>
+                </a:solidFill>
+                <a:latin typeface="Calibri"/>
+              </a:defRPr>
+            </a:pPr>
+            <a:r>
+              <a:t>4. CC(=O)Oc1ccccc1C(=O)O  -&gt;  ?  (hint: common painkiller)</a:t>
+            </a:r>
+          </a:p>
+          <a:p>
+            <a:pPr>
+              <a:spcAft>
+                <a:spcPts val="800"/>
+              </a:spcAft>
+              <a:defRPr sz="2000">
+                <a:solidFill>
+                  <a:srgbClr val="323232"/>
+                </a:solidFill>
+                <a:latin typeface="Calibri"/>
+              </a:defRPr>
+            </a:pPr>
+            <a:r>
+              <a:t>5. Cn1c(=O)c2c(ncn2C)n(C)c1=O  -&gt;  ?  (hint: in your coffee)</a:t>
+            </a:r>
+          </a:p>
+          <a:p>
+            <a:pPr>
+              <a:spcAft>
+                <a:spcPts val="800"/>
+              </a:spcAft>
+              <a:defRPr sz="2000">
+                <a:solidFill>
+                  <a:srgbClr val="323232"/>
+                </a:solidFill>
+                <a:latin typeface="Calibri"/>
+              </a:defRPr>
+            </a:pPr>
+          </a:p>
+          <a:p>
+            <a:pPr>
+              <a:spcAft>
+                <a:spcPts val="800"/>
+              </a:spcAft>
+              <a:defRPr sz="2000">
+                <a:solidFill>
+                  <a:srgbClr val="323232"/>
+                </a:solidFill>
+                <a:latin typeface="Calibri"/>
+              </a:defRPr>
+            </a:pPr>
+            <a:r>
+              <a:t>Answers: 1) Serotonin  2) Dopamine  3) GABA</a:t>
+            </a:r>
+          </a:p>
+          <a:p>
+            <a:pPr>
+              <a:spcAft>
+                <a:spcPts val="800"/>
+              </a:spcAft>
+              <a:defRPr sz="2000">
+                <a:solidFill>
+                  <a:srgbClr val="323232"/>
+                </a:solidFill>
+                <a:latin typeface="Calibri"/>
+              </a:defRPr>
+            </a:pPr>
+            <a:r>
+              <a:t>4) Aspirin  5) Caffeine (adenosine receptor antagonist)</a:t>
             </a:r>
           </a:p>
         </p:txBody>
